--- a/dist/초1/국어/대화와문학/초1_국어_대화와문학_01_바르게듣고차례지켜말하기.pptx
+++ b/dist/초1/국어/대화와문학/초1_국어_대화와문학_01_바르게듣고차례지켜말하기.pptx
@@ -119,19 +119,19 @@
   <p:extLst>
     <p:ext uri="{521415D9-36F7-43E2-AB2F-B90AF26B5E84}">
       <p14:sectionLst xmlns:p14="http://schemas.microsoft.com/office/powerpoint/2010/main">
-        <p14:section name="도입" id="{840e3ac9-3511-595d-d07a-bafa97d44683}">
+        <p14:section name="도입" id="{3a87caad-e1a6-d8bc-6251-99b25b3ebbac}">
           <p14:sldIdLst>
             <p14:sldId id="256"/>
             <p14:sldId id="257"/>
           </p14:sldIdLst>
         </p14:section>
-        <p14:section name="개념" id="{514d037c-080e-3b70-61ea-922152654f11}">
+        <p14:section name="개념" id="{c2e57c60-884f-30cd-4a3e-d9fb5645edf7}">
           <p14:sldIdLst>
             <p14:sldId id="258"/>
             <p14:sldId id="259"/>
           </p14:sldIdLst>
         </p14:section>
-        <p14:section name="연습" id="{0d80840d-3071-e2c5-349f-94c181df66db}">
+        <p14:section name="연습" id="{7c433e79-9965-d972-6abe-fa73a9f4429a}">
           <p14:sldIdLst>
             <p14:sldId id="260"/>
             <p14:sldId id="261"/>
@@ -139,19 +139,19 @@
             <p14:sldId id="263"/>
           </p14:sldIdLst>
         </p14:section>
-        <p14:section name="확인" id="{1954b4c1-9b46-5001-6775-30f12105f9a7}">
+        <p14:section name="확인" id="{beec5c79-8571-3799-40a5-9e08fcfa1f9c}">
           <p14:sldIdLst>
             <p14:sldId id="264"/>
             <p14:sldId id="265"/>
             <p14:sldId id="266"/>
           </p14:sldIdLst>
         </p14:section>
-        <p14:section name="정리" id="{94df43e8-305e-7657-130c-a6812d98fe5f}">
+        <p14:section name="정리" id="{61618e9c-971f-5ea8-09f0-165a0f67762e}">
           <p14:sldIdLst>
             <p14:sldId id="267"/>
           </p14:sldIdLst>
         </p14:section>
-        <p14:section name="보충" id="{1d87ce6b-e815-c02c-7888-553d59a2e556}">
+        <p14:section name="보충" id="{8402dc00-b6b3-d12a-9cd8-a1364575e124}">
           <p14:sldIdLst>
             <p14:sldId id="268"/>
           </p14:sldIdLst>

--- a/dist/초1/국어/대화와문학/초1_국어_대화와문학_01_바르게듣고차례지켜말하기.pptx
+++ b/dist/초1/국어/대화와문학/초1_국어_대화와문학_01_바르게듣고차례지켜말하기.pptx
@@ -119,19 +119,19 @@
   <p:extLst>
     <p:ext uri="{521415D9-36F7-43E2-AB2F-B90AF26B5E84}">
       <p14:sectionLst xmlns:p14="http://schemas.microsoft.com/office/powerpoint/2010/main">
-        <p14:section name="도입" id="{3a87caad-e1a6-d8bc-6251-99b25b3ebbac}">
+        <p14:section name="도입" id="{f86510d9-b3f5-176e-b58c-7576dafb776a}">
           <p14:sldIdLst>
             <p14:sldId id="256"/>
             <p14:sldId id="257"/>
           </p14:sldIdLst>
         </p14:section>
-        <p14:section name="개념" id="{c2e57c60-884f-30cd-4a3e-d9fb5645edf7}">
+        <p14:section name="개념" id="{720e9123-16ff-e200-4ab5-c4b50024637f}">
           <p14:sldIdLst>
             <p14:sldId id="258"/>
             <p14:sldId id="259"/>
           </p14:sldIdLst>
         </p14:section>
-        <p14:section name="연습" id="{7c433e79-9965-d972-6abe-fa73a9f4429a}">
+        <p14:section name="연습" id="{4d4d4591-b474-3518-4089-6bba078f9849}">
           <p14:sldIdLst>
             <p14:sldId id="260"/>
             <p14:sldId id="261"/>
@@ -139,19 +139,19 @@
             <p14:sldId id="263"/>
           </p14:sldIdLst>
         </p14:section>
-        <p14:section name="확인" id="{beec5c79-8571-3799-40a5-9e08fcfa1f9c}">
+        <p14:section name="확인" id="{e6a21616-0e28-8d03-ca92-a4b689e7e2b2}">
           <p14:sldIdLst>
             <p14:sldId id="264"/>
             <p14:sldId id="265"/>
             <p14:sldId id="266"/>
           </p14:sldIdLst>
         </p14:section>
-        <p14:section name="정리" id="{61618e9c-971f-5ea8-09f0-165a0f67762e}">
+        <p14:section name="정리" id="{43f3bc44-1806-3775-a214-a10c4737bc50}">
           <p14:sldIdLst>
             <p14:sldId id="267"/>
           </p14:sldIdLst>
         </p14:section>
-        <p14:section name="보충" id="{8402dc00-b6b3-d12a-9cd8-a1364575e124}">
+        <p14:section name="보충" id="{f18b3734-3b20-1943-a556-e7784e7e74ec}">
           <p14:sldIdLst>
             <p14:sldId id="268"/>
           </p14:sldIdLst>
@@ -2841,7 +2841,7 @@
               <a:buNone/>
             </a:pPr>
             <a:r>
-              <a:rPr lang="ko-KR" altLang="en-US" sz="5000" b="1" dirty="0">
+              <a:rPr lang="ko-KR" altLang="en-US" sz="4800" b="1" dirty="0">
                 <a:solidFill>
                   <a:srgbClr val="FFFFFF"/>
                 </a:solidFill>
